--- a/HR Foundation Setup.pptx
+++ b/HR Foundation Setup.pptx
@@ -13,7 +13,7 @@
     <p:sldId id="258" r:id="rId4"/>
     <p:sldId id="259" r:id="rId5"/>
     <p:sldId id="260" r:id="rId6"/>
-    <p:sldId id="263" r:id="rId7"/>
+    <p:sldId id="261" r:id="rId7"/>
   </p:sldIdLst>
   <p:sldSz cx="9144000" cy="5143500" type="screen16x9"/>
   <p:notesSz cx="6858000" cy="9144000"/>
@@ -735,8 +735,8 @@
         </p:nvSpPr>
         <p:spPr>
           <a:xfrm>
-            <a:off x="381300" y="685800"/>
-            <a:ext cx="6096075" cy="3429000"/>
+            <a:off x="381000" y="685800"/>
+            <a:ext cx="6096000" cy="3429000"/>
           </a:xfrm>
           <a:custGeom>
             <a:avLst/>
@@ -839,7 +839,7 @@
         </p:nvSpPr>
         <p:spPr>
           <a:xfrm>
-            <a:off x="381300" y="685800"/>
+            <a:off x="381000" y="685800"/>
             <a:ext cx="6096000" cy="3429000"/>
           </a:xfrm>
           <a:custGeom>
@@ -1151,7 +1151,7 @@
         </p:nvSpPr>
         <p:spPr>
           <a:xfrm>
-            <a:off x="381300" y="685800"/>
+            <a:off x="381000" y="685800"/>
             <a:ext cx="6096000" cy="3429000"/>
           </a:xfrm>
           <a:custGeom>
@@ -8123,37 +8123,10 @@
       </p:grpSpPr>
       <p:sp>
         <p:nvSpPr>
-          <p:cNvPr id="2" name="Title 1">
-            <a:extLst>
-              <a:ext uri="{FF2B5EF4-FFF2-40B4-BE49-F238E27FC236}">
-                <a16:creationId xmlns:a16="http://schemas.microsoft.com/office/drawing/2014/main" id="{B70D362D-A41C-4433-B61E-99A576B6277B}"/>
-              </a:ext>
-            </a:extLst>
-          </p:cNvPr>
-          <p:cNvSpPr>
-            <a:spLocks noGrp="1"/>
-          </p:cNvSpPr>
-          <p:nvPr>
-            <p:ph type="title"/>
-          </p:nvPr>
-        </p:nvSpPr>
-        <p:spPr/>
-        <p:txBody>
-          <a:bodyPr>
-            <a:normAutofit fontScale="90000"/>
-          </a:bodyPr>
-          <a:lstStyle/>
-          <a:p>
-            <a:endParaRPr lang="ar-EG"/>
-          </a:p>
-        </p:txBody>
-      </p:sp>
-      <p:sp>
-        <p:nvSpPr>
           <p:cNvPr id="3" name="Text Placeholder 2">
             <a:extLst>
               <a:ext uri="{FF2B5EF4-FFF2-40B4-BE49-F238E27FC236}">
-                <a16:creationId xmlns:a16="http://schemas.microsoft.com/office/drawing/2014/main" id="{08586CC4-7FC0-460E-8B42-6C261117CFC6}"/>
+                <a16:creationId xmlns:a16="http://schemas.microsoft.com/office/drawing/2014/main" id="{42DB6373-ACE3-4E88-8583-FED94E2385CB}"/>
               </a:ext>
             </a:extLst>
           </p:cNvPr>
@@ -8164,7 +8137,12 @@
             <p:ph type="body" idx="1"/>
           </p:nvPr>
         </p:nvSpPr>
-        <p:spPr/>
+        <p:spPr>
+          <a:xfrm>
+            <a:off x="0" y="0"/>
+            <a:ext cx="9144000" cy="5143500"/>
+          </a:xfrm>
+        </p:spPr>
         <p:txBody>
           <a:bodyPr/>
           <a:lstStyle/>
@@ -8178,10 +8156,10 @@
       </p:sp>
       <p:pic>
         <p:nvPicPr>
-          <p:cNvPr id="8" name="Picture 7">
+          <p:cNvPr id="7" name="Picture 6">
             <a:extLst>
               <a:ext uri="{FF2B5EF4-FFF2-40B4-BE49-F238E27FC236}">
-                <a16:creationId xmlns:a16="http://schemas.microsoft.com/office/drawing/2014/main" id="{B8236986-379F-4A8B-88D1-5ECBC13D4EBD}"/>
+                <a16:creationId xmlns:a16="http://schemas.microsoft.com/office/drawing/2014/main" id="{C485A9ED-B55E-4F06-B9C8-702B01BB36FA}"/>
               </a:ext>
             </a:extLst>
           </p:cNvPr>
@@ -8198,8 +8176,8 @@
         </p:blipFill>
         <p:spPr>
           <a:xfrm>
-            <a:off x="0" y="571500"/>
-            <a:ext cx="9144000" cy="4000500"/>
+            <a:off x="0" y="0"/>
+            <a:ext cx="9144000" cy="5143500"/>
           </a:xfrm>
           <a:prstGeom prst="rect">
             <a:avLst/>
@@ -8209,7 +8187,7 @@
     </p:spTree>
     <p:extLst>
       <p:ext uri="{BB962C8B-B14F-4D97-AF65-F5344CB8AC3E}">
-        <p14:creationId xmlns:p14="http://schemas.microsoft.com/office/powerpoint/2010/main" val="2898279879"/>
+        <p14:creationId xmlns:p14="http://schemas.microsoft.com/office/powerpoint/2010/main" val="726855600"/>
       </p:ext>
     </p:extLst>
   </p:cSld>
